--- a/site/clases/parte-4-mlops/196-feature-stores-feast/clase-196-feature-stores-feast-presentacion.pptx
+++ b/site/clases/parte-4-mlops/196-feature-stores-feast/clase-196-feature-stores-feast-presentacion.pptx
@@ -3272,7 +3272,7 @@
                 </a:solidFill>
                 <a:latin typeface="Segoe UI"/>
               </a:rPr>
-              <a:t>Parte: 4 — MLOps · Fuente: Huyen cap. 6 + Feast docs 0.40+.  Duración estimada: 70 min.</a:t>
+              <a:t>Parte: 4 — MLOps · Fuente: Huyen cap. 6 + Feast docs 0.40+.  Duración estimada: 70 min. · Nivel: Avanzado</a:t>
             </a:r>
           </a:p>
         </p:txBody>
@@ -3581,7 +3581,7 @@
                 </a:solidFill>
                 <a:latin typeface="Segoe UI"/>
               </a:rPr>
-              <a:t>Parte: 4 — MLOps · Fuente: Huyen cap. 6 + Feast docs 0.40+.  Duración estimada: 70 min.</a:t>
+              <a:t>Parte: 4 — MLOps · Fuente: Huyen cap. 6 + Feast docs 0.40+.  Duración estimada: 70 min. · Nivel: Avanzado</a:t>
             </a:r>
           </a:p>
         </p:txBody>
